--- a/prompt-engineering-course/prompt_engineering_presentation_support/PE_S9_capstone.pptx
+++ b/prompt-engineering-course/prompt_engineering_presentation_support/PE_S9_capstone.pptx
@@ -2629,7 +2629,7 @@
     <p:bg>
       <p:bgPr>
         <a:solidFill>
-          <a:srgbClr val="281C16"/>
+          <a:srgbClr val="301A12"/>
         </a:solidFill>
       </p:bgPr>
     </p:bg>
@@ -2655,12 +2655,12 @@
         </p:nvSpPr>
         <p:spPr>
           <a:xfrm>
-            <a:off x="10588752" y="502920"/>
-            <a:ext cx="1051560" cy="384048"/>
+            <a:off x="10405872" y="457200"/>
+            <a:ext cx="1234440" cy="457200"/>
           </a:xfrm>
           <a:prstGeom prst="roundRect">
             <a:avLst>
-              <a:gd name="adj" fmla="val 47619"/>
+              <a:gd name="adj" fmla="val 20000"/>
             </a:avLst>
           </a:prstGeom>
           <a:solidFill>
@@ -2677,8 +2677,8 @@
         </p:nvSpPr>
         <p:spPr>
           <a:xfrm>
-            <a:off x="10588752" y="502920"/>
-            <a:ext cx="1051560" cy="384048"/>
+            <a:off x="10405872" y="457200"/>
+            <a:ext cx="1234440" cy="457200"/>
           </a:xfrm>
           <a:prstGeom prst="rect">
             <a:avLst/>
@@ -2694,17 +2694,17 @@
               <a:buNone/>
             </a:pPr>
             <a:r>
-              <a:rPr lang="en-US" sz="1300" b="1" spc="200" kern="0" dirty="0">
-                <a:solidFill>
-                  <a:srgbClr val="281C16"/>
+              <a:rPr lang="en-US" sz="1400" b="1" spc="200" kern="0" dirty="0">
+                <a:solidFill>
+                  <a:srgbClr val="301A12"/>
                 </a:solidFill>
                 <a:latin typeface="Courier New" pitchFamily="34" charset="0"/>
                 <a:ea typeface="Courier New" pitchFamily="34" charset="-122"/>
                 <a:cs typeface="Courier New" pitchFamily="34" charset="-120"/>
               </a:rPr>
-              <a:t>GIT</a:t>
-            </a:r>
-            <a:endParaRPr lang="en-US" sz="1300" dirty="0"/>
+              <a:t>● GIT</a:t>
+            </a:r>
+            <a:endParaRPr lang="en-US" sz="1400" dirty="0"/>
           </a:p>
         </p:txBody>
       </p:sp>
@@ -2774,7 +2774,7 @@
             <a:r>
               <a:rPr lang="en-US" sz="3400" b="1" dirty="0">
                 <a:solidFill>
-                  <a:srgbClr val="C0CAF5"/>
+                  <a:srgbClr val="F6E6DB"/>
                 </a:solidFill>
                 <a:latin typeface="Calibri" pitchFamily="34" charset="0"/>
                 <a:ea typeface="Calibri" pitchFamily="34" charset="-122"/>
@@ -2817,7 +2817,7 @@
             <a:r>
               <a:rPr lang="en-US" sz="1600" dirty="0">
                 <a:solidFill>
-                  <a:srgbClr val="A9B1D6"/>
+                  <a:srgbClr val="E0C6B6"/>
                 </a:solidFill>
                 <a:latin typeface="Calibri" pitchFamily="34" charset="0"/>
                 <a:ea typeface="Calibri" pitchFamily="34" charset="-122"/>
@@ -2838,7 +2838,7 @@
             <a:r>
               <a:rPr lang="en-US" sz="1600" dirty="0">
                 <a:solidFill>
-                  <a:srgbClr val="A9B1D6"/>
+                  <a:srgbClr val="E0C6B6"/>
                 </a:solidFill>
                 <a:latin typeface="Calibri" pitchFamily="34" charset="0"/>
                 <a:ea typeface="Calibri" pitchFamily="34" charset="-122"/>
@@ -2859,7 +2859,7 @@
             <a:r>
               <a:rPr lang="en-US" sz="1600" dirty="0">
                 <a:solidFill>
-                  <a:srgbClr val="A9B1D6"/>
+                  <a:srgbClr val="E0C6B6"/>
                 </a:solidFill>
                 <a:latin typeface="Calibri" pitchFamily="34" charset="0"/>
                 <a:ea typeface="Calibri" pitchFamily="34" charset="-122"/>
@@ -2880,7 +2880,7 @@
             <a:r>
               <a:rPr lang="en-US" sz="1600" dirty="0">
                 <a:solidFill>
-                  <a:srgbClr val="A9B1D6"/>
+                  <a:srgbClr val="E0C6B6"/>
                 </a:solidFill>
                 <a:latin typeface="Calibri" pitchFamily="34" charset="0"/>
                 <a:ea typeface="Calibri" pitchFamily="34" charset="-122"/>
@@ -2909,7 +2909,7 @@
             </a:avLst>
           </a:prstGeom>
           <a:solidFill>
-            <a:srgbClr val="24283B"/>
+            <a:srgbClr val="3E2418"/>
           </a:solidFill>
           <a:ln w="15875">
             <a:solidFill>
@@ -2987,7 +2987,7 @@
         <p:spPr>
           <a:xfrm>
             <a:off x="7269480" y="3108960"/>
-            <a:ext cx="4160520" cy="2286000"/>
+            <a:ext cx="4160520" cy="2194560"/>
           </a:xfrm>
           <a:prstGeom prst="rect">
             <a:avLst/>
@@ -3005,7 +3005,7 @@
             <a:r>
               <a:rPr lang="en-US" sz="1600" dirty="0">
                 <a:solidFill>
-                  <a:srgbClr val="C0CAF5"/>
+                  <a:srgbClr val="F6E6DB"/>
                 </a:solidFill>
                 <a:latin typeface="Calibri" pitchFamily="34" charset="0"/>
                 <a:ea typeface="Calibri" pitchFamily="34" charset="-122"/>
@@ -3268,13 +3268,52 @@
       </p:sp>
       <p:sp>
         <p:nvSpPr>
-          <p:cNvPr id="4" name="Shape 2"/>
+          <p:cNvPr id="4" name="Text 2"/>
+          <p:cNvSpPr txBox="1"/>
+          <p:nvPr/>
+        </p:nvSpPr>
+        <p:spPr>
+          <a:xfrm>
+            <a:off x="548640" y="1627632"/>
+            <a:ext cx="10881360" cy="502920"/>
+          </a:xfrm>
+          <a:prstGeom prst="rect">
+            <a:avLst/>
+          </a:prstGeom>
+          <a:noFill/>
+          <a:ln/>
+        </p:spPr>
+        <p:txBody>
+          <a:bodyPr wrap="square" lIns="0" tIns="0" rIns="0" bIns="0" rtlCol="0" anchor="t"/>
+          <a:lstStyle/>
+          <a:p>
+            <a:pPr algn="l" indent="0" marL="0">
+              <a:buNone/>
+            </a:pPr>
+            <a:r>
+              <a:rPr lang="en-US" sz="1500" dirty="0">
+                <a:solidFill>
+                  <a:srgbClr val="A9B1D6"/>
+                </a:solidFill>
+                <a:latin typeface="Calibri" pitchFamily="34" charset="0"/>
+                <a:ea typeface="Calibri" pitchFamily="34" charset="-122"/>
+                <a:cs typeface="Calibri" pitchFamily="34" charset="-120"/>
+              </a:rPr>
+              <a:t>Here's how to spend your ten minutes so the work speaks for itself.</a:t>
+            </a:r>
+            <a:endParaRPr lang="en-US" sz="1500" dirty="0"/>
+          </a:p>
+        </p:txBody>
+      </p:sp>
+      <p:sp>
+        <p:nvSpPr>
+          <p:cNvPr id="5" name="Shape 3"/>
           <p:cNvSpPr/>
           <p:nvPr/>
         </p:nvSpPr>
         <p:spPr>
           <a:xfrm>
-            <a:off x="548640" y="2103120"/>
+            <a:off x="548640" y="2432304"/>
             <a:ext cx="530352" cy="530352"/>
           </a:xfrm>
           <a:prstGeom prst="ellipse">
@@ -3288,13 +3327,13 @@
       </p:sp>
       <p:sp>
         <p:nvSpPr>
-          <p:cNvPr id="5" name="Text 3"/>
-          <p:cNvSpPr txBox="1"/>
-          <p:nvPr/>
-        </p:nvSpPr>
-        <p:spPr>
-          <a:xfrm>
-            <a:off x="548640" y="2103120"/>
+          <p:cNvPr id="6" name="Text 4"/>
+          <p:cNvSpPr txBox="1"/>
+          <p:nvPr/>
+        </p:nvSpPr>
+        <p:spPr>
+          <a:xfrm>
+            <a:off x="548640" y="2432304"/>
             <a:ext cx="530352" cy="530352"/>
           </a:xfrm>
           <a:prstGeom prst="rect">
@@ -3327,13 +3366,13 @@
       </p:sp>
       <p:sp>
         <p:nvSpPr>
-          <p:cNvPr id="6" name="Text 4"/>
-          <p:cNvSpPr txBox="1"/>
-          <p:nvPr/>
-        </p:nvSpPr>
-        <p:spPr>
-          <a:xfrm>
-            <a:off x="1325880" y="2084832"/>
+          <p:cNvPr id="7" name="Text 5"/>
+          <p:cNvSpPr txBox="1"/>
+          <p:nvPr/>
+        </p:nvSpPr>
+        <p:spPr>
+          <a:xfrm>
+            <a:off x="1325880" y="2414016"/>
             <a:ext cx="10424160" cy="411480"/>
           </a:xfrm>
           <a:prstGeom prst="rect">
@@ -3366,14 +3405,14 @@
       </p:sp>
       <p:sp>
         <p:nvSpPr>
-          <p:cNvPr id="7" name="Text 5"/>
-          <p:cNvSpPr txBox="1"/>
-          <p:nvPr/>
-        </p:nvSpPr>
-        <p:spPr>
-          <a:xfrm>
-            <a:off x="1325880" y="2468880"/>
-            <a:ext cx="10424160" cy="667512"/>
+          <p:cNvPr id="8" name="Text 6"/>
+          <p:cNvSpPr txBox="1"/>
+          <p:nvPr/>
+        </p:nvSpPr>
+        <p:spPr>
+          <a:xfrm>
+            <a:off x="1325880" y="2798064"/>
+            <a:ext cx="10424160" cy="585216"/>
           </a:xfrm>
           <a:prstGeom prst="rect">
             <a:avLst/>
@@ -3405,13 +3444,13 @@
       </p:sp>
       <p:sp>
         <p:nvSpPr>
-          <p:cNvPr id="8" name="Shape 6"/>
+          <p:cNvPr id="9" name="Shape 7"/>
           <p:cNvSpPr/>
           <p:nvPr/>
         </p:nvSpPr>
         <p:spPr>
           <a:xfrm>
-            <a:off x="548640" y="3209544"/>
+            <a:off x="548640" y="3456432"/>
             <a:ext cx="530352" cy="530352"/>
           </a:xfrm>
           <a:prstGeom prst="ellipse">
@@ -3425,13 +3464,13 @@
       </p:sp>
       <p:sp>
         <p:nvSpPr>
-          <p:cNvPr id="9" name="Text 7"/>
-          <p:cNvSpPr txBox="1"/>
-          <p:nvPr/>
-        </p:nvSpPr>
-        <p:spPr>
-          <a:xfrm>
-            <a:off x="548640" y="3209544"/>
+          <p:cNvPr id="10" name="Text 8"/>
+          <p:cNvSpPr txBox="1"/>
+          <p:nvPr/>
+        </p:nvSpPr>
+        <p:spPr>
+          <a:xfrm>
+            <a:off x="548640" y="3456432"/>
             <a:ext cx="530352" cy="530352"/>
           </a:xfrm>
           <a:prstGeom prst="rect">
@@ -3464,13 +3503,13 @@
       </p:sp>
       <p:sp>
         <p:nvSpPr>
-          <p:cNvPr id="10" name="Text 8"/>
-          <p:cNvSpPr txBox="1"/>
-          <p:nvPr/>
-        </p:nvSpPr>
-        <p:spPr>
-          <a:xfrm>
-            <a:off x="1325880" y="3191256"/>
+          <p:cNvPr id="11" name="Text 9"/>
+          <p:cNvSpPr txBox="1"/>
+          <p:nvPr/>
+        </p:nvSpPr>
+        <p:spPr>
+          <a:xfrm>
+            <a:off x="1325880" y="3438144"/>
             <a:ext cx="10424160" cy="411480"/>
           </a:xfrm>
           <a:prstGeom prst="rect">
@@ -3503,14 +3542,14 @@
       </p:sp>
       <p:sp>
         <p:nvSpPr>
-          <p:cNvPr id="11" name="Text 9"/>
-          <p:cNvSpPr txBox="1"/>
-          <p:nvPr/>
-        </p:nvSpPr>
-        <p:spPr>
-          <a:xfrm>
-            <a:off x="1325880" y="3575304"/>
-            <a:ext cx="10424160" cy="667512"/>
+          <p:cNvPr id="12" name="Text 10"/>
+          <p:cNvSpPr txBox="1"/>
+          <p:nvPr/>
+        </p:nvSpPr>
+        <p:spPr>
+          <a:xfrm>
+            <a:off x="1325880" y="3822192"/>
+            <a:ext cx="10424160" cy="585216"/>
           </a:xfrm>
           <a:prstGeom prst="rect">
             <a:avLst/>
@@ -3542,13 +3581,13 @@
       </p:sp>
       <p:sp>
         <p:nvSpPr>
-          <p:cNvPr id="12" name="Shape 10"/>
+          <p:cNvPr id="13" name="Shape 11"/>
           <p:cNvSpPr/>
           <p:nvPr/>
         </p:nvSpPr>
         <p:spPr>
           <a:xfrm>
-            <a:off x="548640" y="4315968"/>
+            <a:off x="548640" y="4480560"/>
             <a:ext cx="530352" cy="530352"/>
           </a:xfrm>
           <a:prstGeom prst="ellipse">
@@ -3562,13 +3601,13 @@
       </p:sp>
       <p:sp>
         <p:nvSpPr>
-          <p:cNvPr id="13" name="Text 11"/>
-          <p:cNvSpPr txBox="1"/>
-          <p:nvPr/>
-        </p:nvSpPr>
-        <p:spPr>
-          <a:xfrm>
-            <a:off x="548640" y="4315968"/>
+          <p:cNvPr id="14" name="Text 12"/>
+          <p:cNvSpPr txBox="1"/>
+          <p:nvPr/>
+        </p:nvSpPr>
+        <p:spPr>
+          <a:xfrm>
+            <a:off x="548640" y="4480560"/>
             <a:ext cx="530352" cy="530352"/>
           </a:xfrm>
           <a:prstGeom prst="rect">
@@ -3601,13 +3640,13 @@
       </p:sp>
       <p:sp>
         <p:nvSpPr>
-          <p:cNvPr id="14" name="Text 12"/>
-          <p:cNvSpPr txBox="1"/>
-          <p:nvPr/>
-        </p:nvSpPr>
-        <p:spPr>
-          <a:xfrm>
-            <a:off x="1325880" y="4297680"/>
+          <p:cNvPr id="15" name="Text 13"/>
+          <p:cNvSpPr txBox="1"/>
+          <p:nvPr/>
+        </p:nvSpPr>
+        <p:spPr>
+          <a:xfrm>
+            <a:off x="1325880" y="4462272"/>
             <a:ext cx="10424160" cy="411480"/>
           </a:xfrm>
           <a:prstGeom prst="rect">
@@ -3640,14 +3679,14 @@
       </p:sp>
       <p:sp>
         <p:nvSpPr>
-          <p:cNvPr id="15" name="Text 13"/>
-          <p:cNvSpPr txBox="1"/>
-          <p:nvPr/>
-        </p:nvSpPr>
-        <p:spPr>
-          <a:xfrm>
-            <a:off x="1325880" y="4681728"/>
-            <a:ext cx="10424160" cy="667512"/>
+          <p:cNvPr id="16" name="Text 14"/>
+          <p:cNvSpPr txBox="1"/>
+          <p:nvPr/>
+        </p:nvSpPr>
+        <p:spPr>
+          <a:xfrm>
+            <a:off x="1325880" y="4846320"/>
+            <a:ext cx="10424160" cy="585216"/>
           </a:xfrm>
           <a:prstGeom prst="rect">
             <a:avLst/>
@@ -3679,13 +3718,13 @@
       </p:sp>
       <p:sp>
         <p:nvSpPr>
-          <p:cNvPr id="16" name="Shape 14"/>
+          <p:cNvPr id="17" name="Shape 15"/>
           <p:cNvSpPr/>
           <p:nvPr/>
         </p:nvSpPr>
         <p:spPr>
           <a:xfrm>
-            <a:off x="548640" y="5422392"/>
+            <a:off x="548640" y="5504688"/>
             <a:ext cx="530352" cy="530352"/>
           </a:xfrm>
           <a:prstGeom prst="ellipse">
@@ -3699,13 +3738,13 @@
       </p:sp>
       <p:sp>
         <p:nvSpPr>
-          <p:cNvPr id="17" name="Text 15"/>
-          <p:cNvSpPr txBox="1"/>
-          <p:nvPr/>
-        </p:nvSpPr>
-        <p:spPr>
-          <a:xfrm>
-            <a:off x="548640" y="5422392"/>
+          <p:cNvPr id="18" name="Text 16"/>
+          <p:cNvSpPr txBox="1"/>
+          <p:nvPr/>
+        </p:nvSpPr>
+        <p:spPr>
+          <a:xfrm>
+            <a:off x="548640" y="5504688"/>
             <a:ext cx="530352" cy="530352"/>
           </a:xfrm>
           <a:prstGeom prst="rect">
@@ -3738,13 +3777,13 @@
       </p:sp>
       <p:sp>
         <p:nvSpPr>
-          <p:cNvPr id="18" name="Text 16"/>
-          <p:cNvSpPr txBox="1"/>
-          <p:nvPr/>
-        </p:nvSpPr>
-        <p:spPr>
-          <a:xfrm>
-            <a:off x="1325880" y="5404104"/>
+          <p:cNvPr id="19" name="Text 17"/>
+          <p:cNvSpPr txBox="1"/>
+          <p:nvPr/>
+        </p:nvSpPr>
+        <p:spPr>
+          <a:xfrm>
+            <a:off x="1325880" y="5486400"/>
             <a:ext cx="10424160" cy="411480"/>
           </a:xfrm>
           <a:prstGeom prst="rect">
@@ -3777,14 +3816,14 @@
       </p:sp>
       <p:sp>
         <p:nvSpPr>
-          <p:cNvPr id="19" name="Text 17"/>
-          <p:cNvSpPr txBox="1"/>
-          <p:nvPr/>
-        </p:nvSpPr>
-        <p:spPr>
-          <a:xfrm>
-            <a:off x="1325880" y="5788152"/>
-            <a:ext cx="10424160" cy="667512"/>
+          <p:cNvPr id="20" name="Text 18"/>
+          <p:cNvSpPr txBox="1"/>
+          <p:nvPr/>
+        </p:nvSpPr>
+        <p:spPr>
+          <a:xfrm>
+            <a:off x="1325880" y="5870448"/>
+            <a:ext cx="10424160" cy="585216"/>
           </a:xfrm>
           <a:prstGeom prst="rect">
             <a:avLst/>
@@ -3816,7 +3855,7 @@
       </p:sp>
       <p:sp>
         <p:nvSpPr>
-          <p:cNvPr id="20" name="Shape 18"/>
+          <p:cNvPr id="21" name="Shape 19"/>
           <p:cNvSpPr/>
           <p:nvPr/>
         </p:nvSpPr>
@@ -3838,7 +3877,7 @@
       </p:sp>
       <p:sp>
         <p:nvSpPr>
-          <p:cNvPr id="21" name="Text 19"/>
+          <p:cNvPr id="22" name="Text 20"/>
           <p:cNvSpPr txBox="1"/>
           <p:nvPr/>
         </p:nvSpPr>
@@ -3877,7 +3916,7 @@
       </p:sp>
       <p:sp>
         <p:nvSpPr>
-          <p:cNvPr id="22" name="Text 20"/>
+          <p:cNvPr id="23" name="Text 21"/>
           <p:cNvSpPr txBox="1"/>
           <p:nvPr/>
         </p:nvSpPr>
@@ -3916,7 +3955,7 @@
       </p:sp>
       <p:sp>
         <p:nvSpPr>
-          <p:cNvPr id="23" name="Text 21"/>
+          <p:cNvPr id="24" name="Text 22"/>
           <p:cNvSpPr txBox="1"/>
           <p:nvPr/>
         </p:nvSpPr>
@@ -4065,13 +4104,52 @@
       </p:sp>
       <p:sp>
         <p:nvSpPr>
-          <p:cNvPr id="4" name="Shape 2"/>
+          <p:cNvPr id="4" name="Text 2"/>
+          <p:cNvSpPr txBox="1"/>
+          <p:nvPr/>
+        </p:nvSpPr>
+        <p:spPr>
+          <a:xfrm>
+            <a:off x="548640" y="1627632"/>
+            <a:ext cx="10881360" cy="502920"/>
+          </a:xfrm>
+          <a:prstGeom prst="rect">
+            <a:avLst/>
+          </a:prstGeom>
+          <a:noFill/>
+          <a:ln/>
+        </p:spPr>
+        <p:txBody>
+          <a:bodyPr wrap="square" lIns="0" tIns="0" rIns="0" bIns="0" rtlCol="0" anchor="t"/>
+          <a:lstStyle/>
+          <a:p>
+            <a:pPr algn="l" indent="0" marL="0">
+              <a:buNone/>
+            </a:pPr>
+            <a:r>
+              <a:rPr lang="en-US" sz="1500" dirty="0">
+                <a:solidFill>
+                  <a:srgbClr val="A9B1D6"/>
+                </a:solidFill>
+                <a:latin typeface="Calibri" pitchFamily="34" charset="0"/>
+                <a:ea typeface="Calibri" pitchFamily="34" charset="-122"/>
+                <a:cs typeface="Calibri" pitchFamily="34" charset="-120"/>
+              </a:rPr>
+              <a:t>No surprises — here's exactly what we're looking for.</a:t>
+            </a:r>
+            <a:endParaRPr lang="en-US" sz="1500" dirty="0"/>
+          </a:p>
+        </p:txBody>
+      </p:sp>
+      <p:sp>
+        <p:nvSpPr>
+          <p:cNvPr id="5" name="Shape 3"/>
           <p:cNvSpPr/>
           <p:nvPr/>
         </p:nvSpPr>
         <p:spPr>
           <a:xfrm>
-            <a:off x="548640" y="2103120"/>
+            <a:off x="548640" y="2432304"/>
             <a:ext cx="5394960" cy="1810512"/>
           </a:xfrm>
           <a:prstGeom prst="roundRect">
@@ -4092,13 +4170,13 @@
       </p:sp>
       <p:sp>
         <p:nvSpPr>
-          <p:cNvPr id="5" name="Shape 3"/>
+          <p:cNvPr id="6" name="Shape 4"/>
           <p:cNvSpPr/>
           <p:nvPr/>
         </p:nvSpPr>
         <p:spPr>
           <a:xfrm>
-            <a:off x="822960" y="2395728"/>
+            <a:off x="822960" y="2724912"/>
             <a:ext cx="548640" cy="548640"/>
           </a:xfrm>
           <a:prstGeom prst="ellipse">
@@ -4112,13 +4190,13 @@
       </p:sp>
       <p:sp>
         <p:nvSpPr>
-          <p:cNvPr id="6" name="Text 4"/>
-          <p:cNvSpPr txBox="1"/>
-          <p:nvPr/>
-        </p:nvSpPr>
-        <p:spPr>
-          <a:xfrm>
-            <a:off x="822960" y="2395728"/>
+          <p:cNvPr id="7" name="Text 5"/>
+          <p:cNvSpPr txBox="1"/>
+          <p:nvPr/>
+        </p:nvSpPr>
+        <p:spPr>
+          <a:xfrm>
+            <a:off x="822960" y="2724912"/>
             <a:ext cx="548640" cy="548640"/>
           </a:xfrm>
           <a:prstGeom prst="rect">
@@ -4151,13 +4229,13 @@
       </p:sp>
       <p:sp>
         <p:nvSpPr>
-          <p:cNvPr id="7" name="Text 5"/>
-          <p:cNvSpPr txBox="1"/>
-          <p:nvPr/>
-        </p:nvSpPr>
-        <p:spPr>
-          <a:xfrm>
-            <a:off x="1508760" y="2359152"/>
+          <p:cNvPr id="8" name="Text 6"/>
+          <p:cNvSpPr txBox="1"/>
+          <p:nvPr/>
+        </p:nvSpPr>
+        <p:spPr>
+          <a:xfrm>
+            <a:off x="1508760" y="2688336"/>
             <a:ext cx="4206240" cy="548640"/>
           </a:xfrm>
           <a:prstGeom prst="rect">
@@ -4190,13 +4268,13 @@
       </p:sp>
       <p:sp>
         <p:nvSpPr>
-          <p:cNvPr id="8" name="Text 6"/>
-          <p:cNvSpPr txBox="1"/>
-          <p:nvPr/>
-        </p:nvSpPr>
-        <p:spPr>
-          <a:xfrm>
-            <a:off x="822960" y="3017520"/>
+          <p:cNvPr id="9" name="Text 7"/>
+          <p:cNvSpPr txBox="1"/>
+          <p:nvPr/>
+        </p:nvSpPr>
+        <p:spPr>
+          <a:xfrm>
+            <a:off x="822960" y="3346704"/>
             <a:ext cx="4846320" cy="822960"/>
           </a:xfrm>
           <a:prstGeom prst="rect">
@@ -4229,13 +4307,13 @@
       </p:sp>
       <p:sp>
         <p:nvSpPr>
-          <p:cNvPr id="9" name="Shape 7"/>
+          <p:cNvPr id="10" name="Shape 8"/>
           <p:cNvSpPr/>
           <p:nvPr/>
         </p:nvSpPr>
         <p:spPr>
           <a:xfrm>
-            <a:off x="6245352" y="2103120"/>
+            <a:off x="6245352" y="2432304"/>
             <a:ext cx="5394960" cy="1810512"/>
           </a:xfrm>
           <a:prstGeom prst="roundRect">
@@ -4256,13 +4334,13 @@
       </p:sp>
       <p:sp>
         <p:nvSpPr>
-          <p:cNvPr id="10" name="Shape 8"/>
+          <p:cNvPr id="11" name="Shape 9"/>
           <p:cNvSpPr/>
           <p:nvPr/>
         </p:nvSpPr>
         <p:spPr>
           <a:xfrm>
-            <a:off x="6519672" y="2395728"/>
+            <a:off x="6519672" y="2724912"/>
             <a:ext cx="548640" cy="548640"/>
           </a:xfrm>
           <a:prstGeom prst="ellipse">
@@ -4276,13 +4354,13 @@
       </p:sp>
       <p:sp>
         <p:nvSpPr>
-          <p:cNvPr id="11" name="Text 9"/>
-          <p:cNvSpPr txBox="1"/>
-          <p:nvPr/>
-        </p:nvSpPr>
-        <p:spPr>
-          <a:xfrm>
-            <a:off x="6519672" y="2395728"/>
+          <p:cNvPr id="12" name="Text 10"/>
+          <p:cNvSpPr txBox="1"/>
+          <p:nvPr/>
+        </p:nvSpPr>
+        <p:spPr>
+          <a:xfrm>
+            <a:off x="6519672" y="2724912"/>
             <a:ext cx="548640" cy="548640"/>
           </a:xfrm>
           <a:prstGeom prst="rect">
@@ -4315,13 +4393,13 @@
       </p:sp>
       <p:sp>
         <p:nvSpPr>
-          <p:cNvPr id="12" name="Text 10"/>
-          <p:cNvSpPr txBox="1"/>
-          <p:nvPr/>
-        </p:nvSpPr>
-        <p:spPr>
-          <a:xfrm>
-            <a:off x="7205472" y="2359152"/>
+          <p:cNvPr id="13" name="Text 11"/>
+          <p:cNvSpPr txBox="1"/>
+          <p:nvPr/>
+        </p:nvSpPr>
+        <p:spPr>
+          <a:xfrm>
+            <a:off x="7205472" y="2688336"/>
             <a:ext cx="4206240" cy="548640"/>
           </a:xfrm>
           <a:prstGeom prst="rect">
@@ -4354,13 +4432,13 @@
       </p:sp>
       <p:sp>
         <p:nvSpPr>
-          <p:cNvPr id="13" name="Text 11"/>
-          <p:cNvSpPr txBox="1"/>
-          <p:nvPr/>
-        </p:nvSpPr>
-        <p:spPr>
-          <a:xfrm>
-            <a:off x="6519672" y="3017520"/>
+          <p:cNvPr id="14" name="Text 12"/>
+          <p:cNvSpPr txBox="1"/>
+          <p:nvPr/>
+        </p:nvSpPr>
+        <p:spPr>
+          <a:xfrm>
+            <a:off x="6519672" y="3346704"/>
             <a:ext cx="4846320" cy="822960"/>
           </a:xfrm>
           <a:prstGeom prst="rect">
@@ -4393,13 +4471,13 @@
       </p:sp>
       <p:sp>
         <p:nvSpPr>
-          <p:cNvPr id="14" name="Shape 12"/>
+          <p:cNvPr id="15" name="Shape 13"/>
           <p:cNvSpPr/>
           <p:nvPr/>
         </p:nvSpPr>
         <p:spPr>
           <a:xfrm>
-            <a:off x="548640" y="4114800"/>
+            <a:off x="548640" y="4443984"/>
             <a:ext cx="5394960" cy="1810512"/>
           </a:xfrm>
           <a:prstGeom prst="roundRect">
@@ -4420,13 +4498,13 @@
       </p:sp>
       <p:sp>
         <p:nvSpPr>
-          <p:cNvPr id="15" name="Shape 13"/>
+          <p:cNvPr id="16" name="Shape 14"/>
           <p:cNvSpPr/>
           <p:nvPr/>
         </p:nvSpPr>
         <p:spPr>
           <a:xfrm>
-            <a:off x="822960" y="4407408"/>
+            <a:off x="822960" y="4736592"/>
             <a:ext cx="548640" cy="548640"/>
           </a:xfrm>
           <a:prstGeom prst="ellipse">
@@ -4440,13 +4518,13 @@
       </p:sp>
       <p:sp>
         <p:nvSpPr>
-          <p:cNvPr id="16" name="Text 14"/>
-          <p:cNvSpPr txBox="1"/>
-          <p:nvPr/>
-        </p:nvSpPr>
-        <p:spPr>
-          <a:xfrm>
-            <a:off x="822960" y="4407408"/>
+          <p:cNvPr id="17" name="Text 15"/>
+          <p:cNvSpPr txBox="1"/>
+          <p:nvPr/>
+        </p:nvSpPr>
+        <p:spPr>
+          <a:xfrm>
+            <a:off x="822960" y="4736592"/>
             <a:ext cx="548640" cy="548640"/>
           </a:xfrm>
           <a:prstGeom prst="rect">
@@ -4479,13 +4557,13 @@
       </p:sp>
       <p:sp>
         <p:nvSpPr>
-          <p:cNvPr id="17" name="Text 15"/>
-          <p:cNvSpPr txBox="1"/>
-          <p:nvPr/>
-        </p:nvSpPr>
-        <p:spPr>
-          <a:xfrm>
-            <a:off x="1508760" y="4370832"/>
+          <p:cNvPr id="18" name="Text 16"/>
+          <p:cNvSpPr txBox="1"/>
+          <p:nvPr/>
+        </p:nvSpPr>
+        <p:spPr>
+          <a:xfrm>
+            <a:off x="1508760" y="4700016"/>
             <a:ext cx="4206240" cy="548640"/>
           </a:xfrm>
           <a:prstGeom prst="rect">
@@ -4518,13 +4596,13 @@
       </p:sp>
       <p:sp>
         <p:nvSpPr>
-          <p:cNvPr id="18" name="Text 16"/>
-          <p:cNvSpPr txBox="1"/>
-          <p:nvPr/>
-        </p:nvSpPr>
-        <p:spPr>
-          <a:xfrm>
-            <a:off x="822960" y="5029200"/>
+          <p:cNvPr id="19" name="Text 17"/>
+          <p:cNvSpPr txBox="1"/>
+          <p:nvPr/>
+        </p:nvSpPr>
+        <p:spPr>
+          <a:xfrm>
+            <a:off x="822960" y="5358384"/>
             <a:ext cx="4846320" cy="822960"/>
           </a:xfrm>
           <a:prstGeom prst="rect">
@@ -4557,13 +4635,13 @@
       </p:sp>
       <p:sp>
         <p:nvSpPr>
-          <p:cNvPr id="19" name="Shape 17"/>
+          <p:cNvPr id="20" name="Shape 18"/>
           <p:cNvSpPr/>
           <p:nvPr/>
         </p:nvSpPr>
         <p:spPr>
           <a:xfrm>
-            <a:off x="6245352" y="4114800"/>
+            <a:off x="6245352" y="4443984"/>
             <a:ext cx="5394960" cy="1810512"/>
           </a:xfrm>
           <a:prstGeom prst="roundRect">
@@ -4584,13 +4662,13 @@
       </p:sp>
       <p:sp>
         <p:nvSpPr>
-          <p:cNvPr id="20" name="Shape 18"/>
+          <p:cNvPr id="21" name="Shape 19"/>
           <p:cNvSpPr/>
           <p:nvPr/>
         </p:nvSpPr>
         <p:spPr>
           <a:xfrm>
-            <a:off x="6519672" y="4407408"/>
+            <a:off x="6519672" y="4736592"/>
             <a:ext cx="548640" cy="548640"/>
           </a:xfrm>
           <a:prstGeom prst="ellipse">
@@ -4604,13 +4682,13 @@
       </p:sp>
       <p:sp>
         <p:nvSpPr>
-          <p:cNvPr id="21" name="Text 19"/>
-          <p:cNvSpPr txBox="1"/>
-          <p:nvPr/>
-        </p:nvSpPr>
-        <p:spPr>
-          <a:xfrm>
-            <a:off x="6519672" y="4407408"/>
+          <p:cNvPr id="22" name="Text 20"/>
+          <p:cNvSpPr txBox="1"/>
+          <p:nvPr/>
+        </p:nvSpPr>
+        <p:spPr>
+          <a:xfrm>
+            <a:off x="6519672" y="4736592"/>
             <a:ext cx="548640" cy="548640"/>
           </a:xfrm>
           <a:prstGeom prst="rect">
@@ -4643,13 +4721,13 @@
       </p:sp>
       <p:sp>
         <p:nvSpPr>
-          <p:cNvPr id="22" name="Text 20"/>
-          <p:cNvSpPr txBox="1"/>
-          <p:nvPr/>
-        </p:nvSpPr>
-        <p:spPr>
-          <a:xfrm>
-            <a:off x="7205472" y="4370832"/>
+          <p:cNvPr id="23" name="Text 21"/>
+          <p:cNvSpPr txBox="1"/>
+          <p:nvPr/>
+        </p:nvSpPr>
+        <p:spPr>
+          <a:xfrm>
+            <a:off x="7205472" y="4700016"/>
             <a:ext cx="4206240" cy="548640"/>
           </a:xfrm>
           <a:prstGeom prst="rect">
@@ -4682,13 +4760,13 @@
       </p:sp>
       <p:sp>
         <p:nvSpPr>
-          <p:cNvPr id="23" name="Text 21"/>
-          <p:cNvSpPr txBox="1"/>
-          <p:nvPr/>
-        </p:nvSpPr>
-        <p:spPr>
-          <a:xfrm>
-            <a:off x="6519672" y="5029200"/>
+          <p:cNvPr id="24" name="Text 22"/>
+          <p:cNvSpPr txBox="1"/>
+          <p:nvPr/>
+        </p:nvSpPr>
+        <p:spPr>
+          <a:xfrm>
+            <a:off x="6519672" y="5358384"/>
             <a:ext cx="4846320" cy="822960"/>
           </a:xfrm>
           <a:prstGeom prst="rect">
@@ -4721,7 +4799,7 @@
       </p:sp>
       <p:sp>
         <p:nvSpPr>
-          <p:cNvPr id="24" name="Shape 22"/>
+          <p:cNvPr id="25" name="Shape 23"/>
           <p:cNvSpPr/>
           <p:nvPr/>
         </p:nvSpPr>
@@ -4743,7 +4821,7 @@
       </p:sp>
       <p:sp>
         <p:nvSpPr>
-          <p:cNvPr id="25" name="Text 23"/>
+          <p:cNvPr id="26" name="Text 24"/>
           <p:cNvSpPr txBox="1"/>
           <p:nvPr/>
         </p:nvSpPr>
@@ -4782,7 +4860,7 @@
       </p:sp>
       <p:sp>
         <p:nvSpPr>
-          <p:cNvPr id="26" name="Text 24"/>
+          <p:cNvPr id="27" name="Text 25"/>
           <p:cNvSpPr txBox="1"/>
           <p:nvPr/>
         </p:nvSpPr>
@@ -4821,7 +4899,7 @@
       </p:sp>
       <p:sp>
         <p:nvSpPr>
-          <p:cNvPr id="27" name="Text 25"/>
+          <p:cNvPr id="28" name="Text 26"/>
           <p:cNvSpPr txBox="1"/>
           <p:nvPr/>
         </p:nvSpPr>
@@ -4976,8 +5054,47 @@
         </p:nvSpPr>
         <p:spPr>
           <a:xfrm>
-            <a:off x="548640" y="2011680"/>
-            <a:ext cx="6126480" cy="3840480"/>
+            <a:off x="548640" y="1627632"/>
+            <a:ext cx="10881360" cy="502920"/>
+          </a:xfrm>
+          <a:prstGeom prst="rect">
+            <a:avLst/>
+          </a:prstGeom>
+          <a:noFill/>
+          <a:ln/>
+        </p:spPr>
+        <p:txBody>
+          <a:bodyPr wrap="square" lIns="0" tIns="0" rIns="0" bIns="0" rtlCol="0" anchor="t"/>
+          <a:lstStyle/>
+          <a:p>
+            <a:pPr algn="l" indent="0" marL="0">
+              <a:buNone/>
+            </a:pPr>
+            <a:r>
+              <a:rPr lang="en-US" sz="1500" dirty="0">
+                <a:solidFill>
+                  <a:srgbClr val="A9B1D6"/>
+                </a:solidFill>
+                <a:latin typeface="Calibri" pitchFamily="34" charset="0"/>
+                <a:ea typeface="Calibri" pitchFamily="34" charset="-122"/>
+                <a:cs typeface="Calibri" pitchFamily="34" charset="-120"/>
+              </a:rPr>
+              <a:t>A quick word on how to be a useful audience for each other.</a:t>
+            </a:r>
+            <a:endParaRPr lang="en-US" sz="1500" dirty="0"/>
+          </a:p>
+        </p:txBody>
+      </p:sp>
+      <p:sp>
+        <p:nvSpPr>
+          <p:cNvPr id="5" name="Text 3"/>
+          <p:cNvSpPr txBox="1"/>
+          <p:nvPr/>
+        </p:nvSpPr>
+        <p:spPr>
+          <a:xfrm>
+            <a:off x="548640" y="2340864"/>
+            <a:ext cx="6126480" cy="3511296"/>
           </a:xfrm>
           <a:prstGeom prst="rect">
             <a:avLst/>
@@ -5115,18 +5232,18 @@
       </p:sp>
       <p:sp>
         <p:nvSpPr>
-          <p:cNvPr id="5" name="Shape 3"/>
+          <p:cNvPr id="6" name="Shape 4"/>
           <p:cNvSpPr/>
           <p:nvPr/>
         </p:nvSpPr>
         <p:spPr>
           <a:xfrm>
-            <a:off x="6995160" y="2148840"/>
-            <a:ext cx="4645152" cy="3383280"/>
+            <a:off x="6995160" y="2478024"/>
+            <a:ext cx="4645152" cy="3054096"/>
           </a:xfrm>
           <a:prstGeom prst="roundRect">
             <a:avLst>
-              <a:gd name="adj" fmla="val 2432"/>
+              <a:gd name="adj" fmla="val 2695"/>
             </a:avLst>
           </a:prstGeom>
           <a:solidFill>
@@ -5142,13 +5259,13 @@
       </p:sp>
       <p:sp>
         <p:nvSpPr>
-          <p:cNvPr id="6" name="Shape 4"/>
+          <p:cNvPr id="7" name="Shape 5"/>
           <p:cNvSpPr/>
           <p:nvPr/>
         </p:nvSpPr>
         <p:spPr>
           <a:xfrm>
-            <a:off x="7269480" y="2423160"/>
+            <a:off x="7269480" y="2752344"/>
             <a:ext cx="457200" cy="457200"/>
           </a:xfrm>
           <a:prstGeom prst="ellipse">
@@ -5162,13 +5279,13 @@
       </p:sp>
       <p:sp>
         <p:nvSpPr>
-          <p:cNvPr id="7" name="Text 5"/>
-          <p:cNvSpPr txBox="1"/>
-          <p:nvPr/>
-        </p:nvSpPr>
-        <p:spPr>
-          <a:xfrm>
-            <a:off x="7818120" y="2450592"/>
+          <p:cNvPr id="8" name="Text 6"/>
+          <p:cNvSpPr txBox="1"/>
+          <p:nvPr/>
+        </p:nvSpPr>
+        <p:spPr>
+          <a:xfrm>
+            <a:off x="7818120" y="2779776"/>
             <a:ext cx="3657600" cy="411480"/>
           </a:xfrm>
           <a:prstGeom prst="rect">
@@ -5201,14 +5318,14 @@
       </p:sp>
       <p:sp>
         <p:nvSpPr>
-          <p:cNvPr id="8" name="Text 6"/>
-          <p:cNvSpPr txBox="1"/>
-          <p:nvPr/>
-        </p:nvSpPr>
-        <p:spPr>
-          <a:xfrm>
-            <a:off x="7269480" y="3108960"/>
-            <a:ext cx="4160520" cy="2286000"/>
+          <p:cNvPr id="9" name="Text 7"/>
+          <p:cNvSpPr txBox="1"/>
+          <p:nvPr/>
+        </p:nvSpPr>
+        <p:spPr>
+          <a:xfrm>
+            <a:off x="7269480" y="3438144"/>
+            <a:ext cx="4160520" cy="1865376"/>
           </a:xfrm>
           <a:prstGeom prst="rect">
             <a:avLst/>
@@ -5240,7 +5357,7 @@
       </p:sp>
       <p:sp>
         <p:nvSpPr>
-          <p:cNvPr id="9" name="Shape 7"/>
+          <p:cNvPr id="10" name="Shape 8"/>
           <p:cNvSpPr/>
           <p:nvPr/>
         </p:nvSpPr>
@@ -5262,7 +5379,7 @@
       </p:sp>
       <p:sp>
         <p:nvSpPr>
-          <p:cNvPr id="10" name="Text 8"/>
+          <p:cNvPr id="11" name="Text 9"/>
           <p:cNvSpPr txBox="1"/>
           <p:nvPr/>
         </p:nvSpPr>
@@ -5301,7 +5418,7 @@
       </p:sp>
       <p:sp>
         <p:nvSpPr>
-          <p:cNvPr id="11" name="Text 9"/>
+          <p:cNvPr id="12" name="Text 10"/>
           <p:cNvSpPr txBox="1"/>
           <p:nvPr/>
         </p:nvSpPr>
@@ -5340,7 +5457,7 @@
       </p:sp>
       <p:sp>
         <p:nvSpPr>
-          <p:cNvPr id="12" name="Text 10"/>
+          <p:cNvPr id="13" name="Text 11"/>
           <p:cNvSpPr txBox="1"/>
           <p:nvPr/>
         </p:nvSpPr>
@@ -5489,13 +5606,52 @@
       </p:sp>
       <p:sp>
         <p:nvSpPr>
-          <p:cNvPr id="4" name="Shape 2"/>
+          <p:cNvPr id="4" name="Text 2"/>
+          <p:cNvSpPr txBox="1"/>
+          <p:nvPr/>
+        </p:nvSpPr>
+        <p:spPr>
+          <a:xfrm>
+            <a:off x="548640" y="1627632"/>
+            <a:ext cx="10881360" cy="502920"/>
+          </a:xfrm>
+          <a:prstGeom prst="rect">
+            <a:avLst/>
+          </a:prstGeom>
+          <a:noFill/>
+          <a:ln/>
+        </p:spPr>
+        <p:txBody>
+          <a:bodyPr wrap="square" lIns="0" tIns="0" rIns="0" bIns="0" rtlCol="0" anchor="t"/>
+          <a:lstStyle/>
+          <a:p>
+            <a:pPr algn="l" indent="0" marL="0">
+              <a:buNone/>
+            </a:pPr>
+            <a:r>
+              <a:rPr lang="en-US" sz="1500" dirty="0">
+                <a:solidFill>
+                  <a:srgbClr val="A9B1D6"/>
+                </a:solidFill>
+                <a:latin typeface="Calibri" pitchFamily="34" charset="0"/>
+                <a:ea typeface="Calibri" pitchFamily="34" charset="-122"/>
+                <a:cs typeface="Calibri" pitchFamily="34" charset="-120"/>
+              </a:rPr>
+              <a:t>If you forget every technique but keep these four habits, you'll still be effective — screenshot this one.</a:t>
+            </a:r>
+            <a:endParaRPr lang="en-US" sz="1500" dirty="0"/>
+          </a:p>
+        </p:txBody>
+      </p:sp>
+      <p:sp>
+        <p:nvSpPr>
+          <p:cNvPr id="5" name="Shape 3"/>
           <p:cNvSpPr/>
           <p:nvPr/>
         </p:nvSpPr>
         <p:spPr>
           <a:xfrm>
-            <a:off x="548640" y="2103120"/>
+            <a:off x="548640" y="2432304"/>
             <a:ext cx="5394960" cy="1810512"/>
           </a:xfrm>
           <a:prstGeom prst="roundRect">
@@ -5516,13 +5672,13 @@
       </p:sp>
       <p:sp>
         <p:nvSpPr>
-          <p:cNvPr id="5" name="Shape 3"/>
+          <p:cNvPr id="6" name="Shape 4"/>
           <p:cNvSpPr/>
           <p:nvPr/>
         </p:nvSpPr>
         <p:spPr>
           <a:xfrm>
-            <a:off x="822960" y="2395728"/>
+            <a:off x="822960" y="2724912"/>
             <a:ext cx="548640" cy="548640"/>
           </a:xfrm>
           <a:prstGeom prst="ellipse">
@@ -5536,13 +5692,13 @@
       </p:sp>
       <p:sp>
         <p:nvSpPr>
-          <p:cNvPr id="6" name="Text 4"/>
-          <p:cNvSpPr txBox="1"/>
-          <p:nvPr/>
-        </p:nvSpPr>
-        <p:spPr>
-          <a:xfrm>
-            <a:off x="822960" y="2395728"/>
+          <p:cNvPr id="7" name="Text 5"/>
+          <p:cNvSpPr txBox="1"/>
+          <p:nvPr/>
+        </p:nvSpPr>
+        <p:spPr>
+          <a:xfrm>
+            <a:off x="822960" y="2724912"/>
             <a:ext cx="548640" cy="548640"/>
           </a:xfrm>
           <a:prstGeom prst="rect">
@@ -5575,13 +5731,13 @@
       </p:sp>
       <p:sp>
         <p:nvSpPr>
-          <p:cNvPr id="7" name="Text 5"/>
-          <p:cNvSpPr txBox="1"/>
-          <p:nvPr/>
-        </p:nvSpPr>
-        <p:spPr>
-          <a:xfrm>
-            <a:off x="1508760" y="2359152"/>
+          <p:cNvPr id="8" name="Text 6"/>
+          <p:cNvSpPr txBox="1"/>
+          <p:nvPr/>
+        </p:nvSpPr>
+        <p:spPr>
+          <a:xfrm>
+            <a:off x="1508760" y="2688336"/>
             <a:ext cx="4206240" cy="548640"/>
           </a:xfrm>
           <a:prstGeom prst="rect">
@@ -5614,13 +5770,13 @@
       </p:sp>
       <p:sp>
         <p:nvSpPr>
-          <p:cNvPr id="8" name="Text 6"/>
-          <p:cNvSpPr txBox="1"/>
-          <p:nvPr/>
-        </p:nvSpPr>
-        <p:spPr>
-          <a:xfrm>
-            <a:off x="822960" y="3017520"/>
+          <p:cNvPr id="9" name="Text 7"/>
+          <p:cNvSpPr txBox="1"/>
+          <p:nvPr/>
+        </p:nvSpPr>
+        <p:spPr>
+          <a:xfrm>
+            <a:off x="822960" y="3346704"/>
             <a:ext cx="4846320" cy="822960"/>
           </a:xfrm>
           <a:prstGeom prst="rect">
@@ -5653,13 +5809,13 @@
       </p:sp>
       <p:sp>
         <p:nvSpPr>
-          <p:cNvPr id="9" name="Shape 7"/>
+          <p:cNvPr id="10" name="Shape 8"/>
           <p:cNvSpPr/>
           <p:nvPr/>
         </p:nvSpPr>
         <p:spPr>
           <a:xfrm>
-            <a:off x="6245352" y="2103120"/>
+            <a:off x="6245352" y="2432304"/>
             <a:ext cx="5394960" cy="1810512"/>
           </a:xfrm>
           <a:prstGeom prst="roundRect">
@@ -5680,13 +5836,13 @@
       </p:sp>
       <p:sp>
         <p:nvSpPr>
-          <p:cNvPr id="10" name="Shape 8"/>
+          <p:cNvPr id="11" name="Shape 9"/>
           <p:cNvSpPr/>
           <p:nvPr/>
         </p:nvSpPr>
         <p:spPr>
           <a:xfrm>
-            <a:off x="6519672" y="2395728"/>
+            <a:off x="6519672" y="2724912"/>
             <a:ext cx="548640" cy="548640"/>
           </a:xfrm>
           <a:prstGeom prst="ellipse">
@@ -5700,13 +5856,13 @@
       </p:sp>
       <p:sp>
         <p:nvSpPr>
-          <p:cNvPr id="11" name="Text 9"/>
-          <p:cNvSpPr txBox="1"/>
-          <p:nvPr/>
-        </p:nvSpPr>
-        <p:spPr>
-          <a:xfrm>
-            <a:off x="6519672" y="2395728"/>
+          <p:cNvPr id="12" name="Text 10"/>
+          <p:cNvSpPr txBox="1"/>
+          <p:nvPr/>
+        </p:nvSpPr>
+        <p:spPr>
+          <a:xfrm>
+            <a:off x="6519672" y="2724912"/>
             <a:ext cx="548640" cy="548640"/>
           </a:xfrm>
           <a:prstGeom prst="rect">
@@ -5739,13 +5895,13 @@
       </p:sp>
       <p:sp>
         <p:nvSpPr>
-          <p:cNvPr id="12" name="Text 10"/>
-          <p:cNvSpPr txBox="1"/>
-          <p:nvPr/>
-        </p:nvSpPr>
-        <p:spPr>
-          <a:xfrm>
-            <a:off x="7205472" y="2359152"/>
+          <p:cNvPr id="13" name="Text 11"/>
+          <p:cNvSpPr txBox="1"/>
+          <p:nvPr/>
+        </p:nvSpPr>
+        <p:spPr>
+          <a:xfrm>
+            <a:off x="7205472" y="2688336"/>
             <a:ext cx="4206240" cy="548640"/>
           </a:xfrm>
           <a:prstGeom prst="rect">
@@ -5778,13 +5934,13 @@
       </p:sp>
       <p:sp>
         <p:nvSpPr>
-          <p:cNvPr id="13" name="Text 11"/>
-          <p:cNvSpPr txBox="1"/>
-          <p:nvPr/>
-        </p:nvSpPr>
-        <p:spPr>
-          <a:xfrm>
-            <a:off x="6519672" y="3017520"/>
+          <p:cNvPr id="14" name="Text 12"/>
+          <p:cNvSpPr txBox="1"/>
+          <p:nvPr/>
+        </p:nvSpPr>
+        <p:spPr>
+          <a:xfrm>
+            <a:off x="6519672" y="3346704"/>
             <a:ext cx="4846320" cy="822960"/>
           </a:xfrm>
           <a:prstGeom prst="rect">
@@ -5817,13 +5973,13 @@
       </p:sp>
       <p:sp>
         <p:nvSpPr>
-          <p:cNvPr id="14" name="Shape 12"/>
+          <p:cNvPr id="15" name="Shape 13"/>
           <p:cNvSpPr/>
           <p:nvPr/>
         </p:nvSpPr>
         <p:spPr>
           <a:xfrm>
-            <a:off x="548640" y="4114800"/>
+            <a:off x="548640" y="4443984"/>
             <a:ext cx="5394960" cy="1810512"/>
           </a:xfrm>
           <a:prstGeom prst="roundRect">
@@ -5844,13 +6000,13 @@
       </p:sp>
       <p:sp>
         <p:nvSpPr>
-          <p:cNvPr id="15" name="Shape 13"/>
+          <p:cNvPr id="16" name="Shape 14"/>
           <p:cNvSpPr/>
           <p:nvPr/>
         </p:nvSpPr>
         <p:spPr>
           <a:xfrm>
-            <a:off x="822960" y="4407408"/>
+            <a:off x="822960" y="4736592"/>
             <a:ext cx="548640" cy="548640"/>
           </a:xfrm>
           <a:prstGeom prst="ellipse">
@@ -5864,13 +6020,13 @@
       </p:sp>
       <p:sp>
         <p:nvSpPr>
-          <p:cNvPr id="16" name="Text 14"/>
-          <p:cNvSpPr txBox="1"/>
-          <p:nvPr/>
-        </p:nvSpPr>
-        <p:spPr>
-          <a:xfrm>
-            <a:off x="822960" y="4407408"/>
+          <p:cNvPr id="17" name="Text 15"/>
+          <p:cNvSpPr txBox="1"/>
+          <p:nvPr/>
+        </p:nvSpPr>
+        <p:spPr>
+          <a:xfrm>
+            <a:off x="822960" y="4736592"/>
             <a:ext cx="548640" cy="548640"/>
           </a:xfrm>
           <a:prstGeom prst="rect">
@@ -5903,13 +6059,13 @@
       </p:sp>
       <p:sp>
         <p:nvSpPr>
-          <p:cNvPr id="17" name="Text 15"/>
-          <p:cNvSpPr txBox="1"/>
-          <p:nvPr/>
-        </p:nvSpPr>
-        <p:spPr>
-          <a:xfrm>
-            <a:off x="1508760" y="4370832"/>
+          <p:cNvPr id="18" name="Text 16"/>
+          <p:cNvSpPr txBox="1"/>
+          <p:nvPr/>
+        </p:nvSpPr>
+        <p:spPr>
+          <a:xfrm>
+            <a:off x="1508760" y="4700016"/>
             <a:ext cx="4206240" cy="548640"/>
           </a:xfrm>
           <a:prstGeom prst="rect">
@@ -5942,13 +6098,13 @@
       </p:sp>
       <p:sp>
         <p:nvSpPr>
-          <p:cNvPr id="18" name="Text 16"/>
-          <p:cNvSpPr txBox="1"/>
-          <p:nvPr/>
-        </p:nvSpPr>
-        <p:spPr>
-          <a:xfrm>
-            <a:off x="822960" y="5029200"/>
+          <p:cNvPr id="19" name="Text 17"/>
+          <p:cNvSpPr txBox="1"/>
+          <p:nvPr/>
+        </p:nvSpPr>
+        <p:spPr>
+          <a:xfrm>
+            <a:off x="822960" y="5358384"/>
             <a:ext cx="4846320" cy="822960"/>
           </a:xfrm>
           <a:prstGeom prst="rect">
@@ -5981,13 +6137,13 @@
       </p:sp>
       <p:sp>
         <p:nvSpPr>
-          <p:cNvPr id="19" name="Shape 17"/>
+          <p:cNvPr id="20" name="Shape 18"/>
           <p:cNvSpPr/>
           <p:nvPr/>
         </p:nvSpPr>
         <p:spPr>
           <a:xfrm>
-            <a:off x="6245352" y="4114800"/>
+            <a:off x="6245352" y="4443984"/>
             <a:ext cx="5394960" cy="1810512"/>
           </a:xfrm>
           <a:prstGeom prst="roundRect">
@@ -6008,13 +6164,13 @@
       </p:sp>
       <p:sp>
         <p:nvSpPr>
-          <p:cNvPr id="20" name="Shape 18"/>
+          <p:cNvPr id="21" name="Shape 19"/>
           <p:cNvSpPr/>
           <p:nvPr/>
         </p:nvSpPr>
         <p:spPr>
           <a:xfrm>
-            <a:off x="6519672" y="4407408"/>
+            <a:off x="6519672" y="4736592"/>
             <a:ext cx="548640" cy="548640"/>
           </a:xfrm>
           <a:prstGeom prst="ellipse">
@@ -6028,13 +6184,13 @@
       </p:sp>
       <p:sp>
         <p:nvSpPr>
-          <p:cNvPr id="21" name="Text 19"/>
-          <p:cNvSpPr txBox="1"/>
-          <p:nvPr/>
-        </p:nvSpPr>
-        <p:spPr>
-          <a:xfrm>
-            <a:off x="6519672" y="4407408"/>
+          <p:cNvPr id="22" name="Text 20"/>
+          <p:cNvSpPr txBox="1"/>
+          <p:nvPr/>
+        </p:nvSpPr>
+        <p:spPr>
+          <a:xfrm>
+            <a:off x="6519672" y="4736592"/>
             <a:ext cx="548640" cy="548640"/>
           </a:xfrm>
           <a:prstGeom prst="rect">
@@ -6067,13 +6223,13 @@
       </p:sp>
       <p:sp>
         <p:nvSpPr>
-          <p:cNvPr id="22" name="Text 20"/>
-          <p:cNvSpPr txBox="1"/>
-          <p:nvPr/>
-        </p:nvSpPr>
-        <p:spPr>
-          <a:xfrm>
-            <a:off x="7205472" y="4370832"/>
+          <p:cNvPr id="23" name="Text 21"/>
+          <p:cNvSpPr txBox="1"/>
+          <p:nvPr/>
+        </p:nvSpPr>
+        <p:spPr>
+          <a:xfrm>
+            <a:off x="7205472" y="4700016"/>
             <a:ext cx="4206240" cy="548640"/>
           </a:xfrm>
           <a:prstGeom prst="rect">
@@ -6106,13 +6262,13 @@
       </p:sp>
       <p:sp>
         <p:nvSpPr>
-          <p:cNvPr id="23" name="Text 21"/>
-          <p:cNvSpPr txBox="1"/>
-          <p:nvPr/>
-        </p:nvSpPr>
-        <p:spPr>
-          <a:xfrm>
-            <a:off x="6519672" y="5029200"/>
+          <p:cNvPr id="24" name="Text 22"/>
+          <p:cNvSpPr txBox="1"/>
+          <p:nvPr/>
+        </p:nvSpPr>
+        <p:spPr>
+          <a:xfrm>
+            <a:off x="6519672" y="5358384"/>
             <a:ext cx="4846320" cy="822960"/>
           </a:xfrm>
           <a:prstGeom prst="rect">
@@ -6145,7 +6301,7 @@
       </p:sp>
       <p:sp>
         <p:nvSpPr>
-          <p:cNvPr id="24" name="Shape 22"/>
+          <p:cNvPr id="25" name="Shape 23"/>
           <p:cNvSpPr/>
           <p:nvPr/>
         </p:nvSpPr>
@@ -6167,7 +6323,7 @@
       </p:sp>
       <p:sp>
         <p:nvSpPr>
-          <p:cNvPr id="25" name="Text 23"/>
+          <p:cNvPr id="26" name="Text 24"/>
           <p:cNvSpPr txBox="1"/>
           <p:nvPr/>
         </p:nvSpPr>
@@ -6206,7 +6362,7 @@
       </p:sp>
       <p:sp>
         <p:nvSpPr>
-          <p:cNvPr id="26" name="Text 24"/>
+          <p:cNvPr id="27" name="Text 25"/>
           <p:cNvSpPr txBox="1"/>
           <p:nvPr/>
         </p:nvSpPr>
@@ -6245,7 +6401,7 @@
       </p:sp>
       <p:sp>
         <p:nvSpPr>
-          <p:cNvPr id="27" name="Text 25"/>
+          <p:cNvPr id="28" name="Text 26"/>
           <p:cNvSpPr txBox="1"/>
           <p:nvPr/>
         </p:nvSpPr>
@@ -6400,8 +6556,47 @@
         </p:nvSpPr>
         <p:spPr>
           <a:xfrm>
-            <a:off x="548640" y="2011680"/>
-            <a:ext cx="6126480" cy="3840480"/>
+            <a:off x="548640" y="1627632"/>
+            <a:ext cx="10881360" cy="502920"/>
+          </a:xfrm>
+          <a:prstGeom prst="rect">
+            <a:avLst/>
+          </a:prstGeom>
+          <a:noFill/>
+          <a:ln/>
+        </p:spPr>
+        <p:txBody>
+          <a:bodyPr wrap="square" lIns="0" tIns="0" rIns="0" bIns="0" rtlCol="0" anchor="t"/>
+          <a:lstStyle/>
+          <a:p>
+            <a:pPr algn="l" indent="0" marL="0">
+              <a:buNone/>
+            </a:pPr>
+            <a:r>
+              <a:rPr lang="en-US" sz="1500" dirty="0">
+                <a:solidFill>
+                  <a:srgbClr val="A9B1D6"/>
+                </a:solidFill>
+                <a:latin typeface="Calibri" pitchFamily="34" charset="0"/>
+                <a:ea typeface="Calibri" pitchFamily="34" charset="-122"/>
+                <a:cs typeface="Calibri" pitchFamily="34" charset="-120"/>
+              </a:rPr>
+              <a:t>Finally, a look at where this is all heading, so what you learned keeps paying off after today.</a:t>
+            </a:r>
+            <a:endParaRPr lang="en-US" sz="1500" dirty="0"/>
+          </a:p>
+        </p:txBody>
+      </p:sp>
+      <p:sp>
+        <p:nvSpPr>
+          <p:cNvPr id="5" name="Text 3"/>
+          <p:cNvSpPr txBox="1"/>
+          <p:nvPr/>
+        </p:nvSpPr>
+        <p:spPr>
+          <a:xfrm>
+            <a:off x="548640" y="2340864"/>
+            <a:ext cx="6126480" cy="3511296"/>
           </a:xfrm>
           <a:prstGeom prst="rect">
             <a:avLst/>
@@ -6539,18 +6734,18 @@
       </p:sp>
       <p:sp>
         <p:nvSpPr>
-          <p:cNvPr id="5" name="Shape 3"/>
+          <p:cNvPr id="6" name="Shape 4"/>
           <p:cNvSpPr/>
           <p:nvPr/>
         </p:nvSpPr>
         <p:spPr>
           <a:xfrm>
-            <a:off x="6995160" y="2148840"/>
-            <a:ext cx="4645152" cy="3383280"/>
+            <a:off x="6995160" y="2478024"/>
+            <a:ext cx="4645152" cy="3054096"/>
           </a:xfrm>
           <a:prstGeom prst="roundRect">
             <a:avLst>
-              <a:gd name="adj" fmla="val 2432"/>
+              <a:gd name="adj" fmla="val 2695"/>
             </a:avLst>
           </a:prstGeom>
           <a:solidFill>
@@ -6566,13 +6761,13 @@
       </p:sp>
       <p:sp>
         <p:nvSpPr>
-          <p:cNvPr id="6" name="Shape 4"/>
+          <p:cNvPr id="7" name="Shape 5"/>
           <p:cNvSpPr/>
           <p:nvPr/>
         </p:nvSpPr>
         <p:spPr>
           <a:xfrm>
-            <a:off x="7269480" y="2423160"/>
+            <a:off x="7269480" y="2752344"/>
             <a:ext cx="457200" cy="457200"/>
           </a:xfrm>
           <a:prstGeom prst="ellipse">
@@ -6586,13 +6781,13 @@
       </p:sp>
       <p:sp>
         <p:nvSpPr>
-          <p:cNvPr id="7" name="Text 5"/>
-          <p:cNvSpPr txBox="1"/>
-          <p:nvPr/>
-        </p:nvSpPr>
-        <p:spPr>
-          <a:xfrm>
-            <a:off x="7818120" y="2450592"/>
+          <p:cNvPr id="8" name="Text 6"/>
+          <p:cNvSpPr txBox="1"/>
+          <p:nvPr/>
+        </p:nvSpPr>
+        <p:spPr>
+          <a:xfrm>
+            <a:off x="7818120" y="2779776"/>
             <a:ext cx="3657600" cy="411480"/>
           </a:xfrm>
           <a:prstGeom prst="rect">
@@ -6625,14 +6820,14 @@
       </p:sp>
       <p:sp>
         <p:nvSpPr>
-          <p:cNvPr id="8" name="Text 6"/>
-          <p:cNvSpPr txBox="1"/>
-          <p:nvPr/>
-        </p:nvSpPr>
-        <p:spPr>
-          <a:xfrm>
-            <a:off x="7269480" y="3108960"/>
-            <a:ext cx="4160520" cy="2286000"/>
+          <p:cNvPr id="9" name="Text 7"/>
+          <p:cNvSpPr txBox="1"/>
+          <p:nvPr/>
+        </p:nvSpPr>
+        <p:spPr>
+          <a:xfrm>
+            <a:off x="7269480" y="3438144"/>
+            <a:ext cx="4160520" cy="1865376"/>
           </a:xfrm>
           <a:prstGeom prst="rect">
             <a:avLst/>
@@ -6664,7 +6859,7 @@
       </p:sp>
       <p:sp>
         <p:nvSpPr>
-          <p:cNvPr id="9" name="Shape 7"/>
+          <p:cNvPr id="10" name="Shape 8"/>
           <p:cNvSpPr/>
           <p:nvPr/>
         </p:nvSpPr>
@@ -6686,7 +6881,7 @@
       </p:sp>
       <p:sp>
         <p:nvSpPr>
-          <p:cNvPr id="10" name="Text 8"/>
+          <p:cNvPr id="11" name="Text 9"/>
           <p:cNvSpPr txBox="1"/>
           <p:nvPr/>
         </p:nvSpPr>
@@ -6725,7 +6920,7 @@
       </p:sp>
       <p:sp>
         <p:nvSpPr>
-          <p:cNvPr id="11" name="Text 9"/>
+          <p:cNvPr id="12" name="Text 10"/>
           <p:cNvSpPr txBox="1"/>
           <p:nvPr/>
         </p:nvSpPr>
@@ -6764,7 +6959,7 @@
       </p:sp>
       <p:sp>
         <p:nvSpPr>
-          <p:cNvPr id="12" name="Text 10"/>
+          <p:cNvPr id="13" name="Text 11"/>
           <p:cNvSpPr txBox="1"/>
           <p:nvPr/>
         </p:nvSpPr>
